--- a/lessons/day2-datascience/A_Day2_DataScience_GenAI_Harvard.pptx
+++ b/lessons/day2-datascience/A_Day2_DataScience_GenAI_Harvard.pptx
@@ -644,7 +644,21 @@
             <p:ph type="sldImg"/>
           </p:nvPr>
         </p:nvSpPr>
-        <p:spPr/>
+        <p:spPr>
+          <a:xfrm>
+            <a:off x="-228600" y="1524000"/>
+            <a:ext cx="7315200" cy="4114800"/>
+          </a:xfrm>
+          <a:prstGeom prst="rect">
+            <a:avLst/>
+          </a:prstGeom>
+          <a:noFill/>
+          <a:ln w="12700">
+            <a:solidFill>
+              <a:prstClr val="black"/>
+            </a:solidFill>
+          </a:ln>
+        </p:spPr>
       </p:sp>
       <p:sp>
         <p:nvSpPr>
@@ -656,42 +670,30 @@
             <p:ph type="body" idx="1"/>
           </p:nvPr>
         </p:nvSpPr>
-        <p:spPr/>
+        <p:spPr>
+          <a:xfrm>
+            <a:off x="685800" y="5867400"/>
+            <a:ext cx="5486400" cy="4800600"/>
+          </a:xfrm>
+          <a:prstGeom prst="rect">
+            <a:avLst/>
+          </a:prstGeom>
+        </p:spPr>
         <p:txBody>
           <a:bodyPr/>
           <a:lstStyle/>
           <a:p>
-            <a:endParaRPr lang="en-US" dirty="0"/>
-          </a:p>
-        </p:txBody>
-      </p:sp>
-      <p:sp>
-        <p:nvSpPr>
-          <p:cNvPr id="4" name="Slide Number Placeholder 3"/>
-          <p:cNvSpPr>
-            <a:spLocks noGrp="1"/>
-          </p:cNvSpPr>
-          <p:nvPr>
-            <p:ph type="sldNum" sz="quarter" idx="10"/>
-          </p:nvPr>
-        </p:nvSpPr>
-        <p:spPr/>
-        <p:txBody>
-          <a:bodyPr/>
-          <a:lstStyle/>
-          <a:p>
-            <a:fld id="{F7021451-1387-4CA6-816F-3879F97B5CBC}" type="slidenum">
-              <a:rPr lang="en-US"/>
-              <a:t>19</a:t>
-            </a:fld>
-            <a:endParaRPr lang="en-US"/>
+            <a:r>
+              <a:rPr lang="en-US" dirty="0"/>
+              <a:t>Missing worked example slide!</a:t>
+            </a:r>
           </a:p>
         </p:txBody>
       </p:sp>
     </p:spTree>
     <p:extLst>
       <p:ext uri="{BB962C8B-B14F-4D97-AF65-F5344CB8AC3E}">
-        <p14:creationId xmlns:p14="http://schemas.microsoft.com/office/powerpoint/2010/main" val="1024086991"/>
+        <p14:creationId xmlns:p14="http://schemas.microsoft.com/office/powerpoint/2010/main" val="64140956"/>
       </p:ext>
     </p:extLst>
   </p:cSld>
@@ -766,7 +768,7 @@
           <a:p>
             <a:fld id="{F7021451-1387-4CA6-816F-3879F97B5CBC}" type="slidenum">
               <a:rPr lang="en-US"/>
-              <a:t>20</a:t>
+              <a:t>19</a:t>
             </a:fld>
             <a:endParaRPr lang="en-US"/>
           </a:p>
@@ -850,7 +852,7 @@
           <a:p>
             <a:fld id="{F7021451-1387-4CA6-816F-3879F97B5CBC}" type="slidenum">
               <a:rPr lang="en-US"/>
-              <a:t>21</a:t>
+              <a:t>20</a:t>
             </a:fld>
             <a:endParaRPr lang="en-US"/>
           </a:p>
@@ -870,6 +872,90 @@
 </file>
 
 <file path=ppt/notesSlides/notesSlide16.xml><?xml version="1.0" encoding="utf-8"?>
+<p:notes xmlns:a="http://schemas.openxmlformats.org/drawingml/2006/main" xmlns:r="http://schemas.openxmlformats.org/officeDocument/2006/relationships" xmlns:p="http://schemas.openxmlformats.org/presentationml/2006/main">
+  <p:cSld>
+    <p:spTree>
+      <p:nvGrpSpPr>
+        <p:cNvPr id="1" name=""/>
+        <p:cNvGrpSpPr/>
+        <p:nvPr/>
+      </p:nvGrpSpPr>
+      <p:grpSpPr>
+        <a:xfrm>
+          <a:off x="0" y="0"/>
+          <a:ext cx="0" cy="0"/>
+          <a:chOff x="0" y="0"/>
+          <a:chExt cx="0" cy="0"/>
+        </a:xfrm>
+      </p:grpSpPr>
+      <p:sp>
+        <p:nvSpPr>
+          <p:cNvPr id="2" name="Slide Image Placeholder 1"/>
+          <p:cNvSpPr>
+            <a:spLocks noGrp="1" noRot="1" noChangeAspect="1"/>
+          </p:cNvSpPr>
+          <p:nvPr>
+            <p:ph type="sldImg"/>
+          </p:nvPr>
+        </p:nvSpPr>
+        <p:spPr/>
+      </p:sp>
+      <p:sp>
+        <p:nvSpPr>
+          <p:cNvPr id="3" name="Notes Placeholder 2"/>
+          <p:cNvSpPr>
+            <a:spLocks noGrp="1"/>
+          </p:cNvSpPr>
+          <p:nvPr>
+            <p:ph type="body" idx="1"/>
+          </p:nvPr>
+        </p:nvSpPr>
+        <p:spPr/>
+        <p:txBody>
+          <a:bodyPr/>
+          <a:lstStyle/>
+          <a:p>
+            <a:endParaRPr lang="en-US" dirty="0"/>
+          </a:p>
+        </p:txBody>
+      </p:sp>
+      <p:sp>
+        <p:nvSpPr>
+          <p:cNvPr id="4" name="Slide Number Placeholder 3"/>
+          <p:cNvSpPr>
+            <a:spLocks noGrp="1"/>
+          </p:cNvSpPr>
+          <p:nvPr>
+            <p:ph type="sldNum" sz="quarter" idx="10"/>
+          </p:nvPr>
+        </p:nvSpPr>
+        <p:spPr/>
+        <p:txBody>
+          <a:bodyPr/>
+          <a:lstStyle/>
+          <a:p>
+            <a:fld id="{F7021451-1387-4CA6-816F-3879F97B5CBC}" type="slidenum">
+              <a:rPr lang="en-US"/>
+              <a:t>21</a:t>
+            </a:fld>
+            <a:endParaRPr lang="en-US"/>
+          </a:p>
+        </p:txBody>
+      </p:sp>
+    </p:spTree>
+    <p:extLst>
+      <p:ext uri="{BB962C8B-B14F-4D97-AF65-F5344CB8AC3E}">
+        <p14:creationId xmlns:p14="http://schemas.microsoft.com/office/powerpoint/2010/main" val="1024086991"/>
+      </p:ext>
+    </p:extLst>
+  </p:cSld>
+  <p:clrMapOvr>
+    <a:masterClrMapping/>
+  </p:clrMapOvr>
+</p:notes>
+</file>
+
+<file path=ppt/notesSlides/notesSlide17.xml><?xml version="1.0" encoding="utf-8"?>
 <p:notes xmlns:a="http://schemas.openxmlformats.org/drawingml/2006/main" xmlns:r="http://schemas.openxmlformats.org/officeDocument/2006/relationships" xmlns:p="http://schemas.openxmlformats.org/presentationml/2006/main">
   <p:cSld>
     <p:spTree>
@@ -1013,90 +1099,6 @@
 </p:notes>
 </file>
 
-<file path=ppt/notesSlides/notesSlide17.xml><?xml version="1.0" encoding="utf-8"?>
-<p:notes xmlns:a="http://schemas.openxmlformats.org/drawingml/2006/main" xmlns:r="http://schemas.openxmlformats.org/officeDocument/2006/relationships" xmlns:p="http://schemas.openxmlformats.org/presentationml/2006/main">
-  <p:cSld>
-    <p:spTree>
-      <p:nvGrpSpPr>
-        <p:cNvPr id="1" name=""/>
-        <p:cNvGrpSpPr/>
-        <p:nvPr/>
-      </p:nvGrpSpPr>
-      <p:grpSpPr>
-        <a:xfrm>
-          <a:off x="0" y="0"/>
-          <a:ext cx="0" cy="0"/>
-          <a:chOff x="0" y="0"/>
-          <a:chExt cx="0" cy="0"/>
-        </a:xfrm>
-      </p:grpSpPr>
-      <p:sp>
-        <p:nvSpPr>
-          <p:cNvPr id="2" name="Slide Image Placeholder 1"/>
-          <p:cNvSpPr>
-            <a:spLocks noGrp="1" noRot="1" noChangeAspect="1"/>
-          </p:cNvSpPr>
-          <p:nvPr>
-            <p:ph type="sldImg"/>
-          </p:nvPr>
-        </p:nvSpPr>
-        <p:spPr/>
-      </p:sp>
-      <p:sp>
-        <p:nvSpPr>
-          <p:cNvPr id="3" name="Notes Placeholder 2"/>
-          <p:cNvSpPr>
-            <a:spLocks noGrp="1"/>
-          </p:cNvSpPr>
-          <p:nvPr>
-            <p:ph type="body" idx="1"/>
-          </p:nvPr>
-        </p:nvSpPr>
-        <p:spPr/>
-        <p:txBody>
-          <a:bodyPr/>
-          <a:lstStyle/>
-          <a:p>
-            <a:endParaRPr lang="en-US" dirty="0"/>
-          </a:p>
-        </p:txBody>
-      </p:sp>
-      <p:sp>
-        <p:nvSpPr>
-          <p:cNvPr id="4" name="Slide Number Placeholder 3"/>
-          <p:cNvSpPr>
-            <a:spLocks noGrp="1"/>
-          </p:cNvSpPr>
-          <p:nvPr>
-            <p:ph type="sldNum" sz="quarter" idx="10"/>
-          </p:nvPr>
-        </p:nvSpPr>
-        <p:spPr/>
-        <p:txBody>
-          <a:bodyPr/>
-          <a:lstStyle/>
-          <a:p>
-            <a:fld id="{F7021451-1387-4CA6-816F-3879F97B5CBC}" type="slidenum">
-              <a:rPr lang="en-US"/>
-              <a:t>23</a:t>
-            </a:fld>
-            <a:endParaRPr lang="en-US"/>
-          </a:p>
-        </p:txBody>
-      </p:sp>
-    </p:spTree>
-    <p:extLst>
-      <p:ext uri="{BB962C8B-B14F-4D97-AF65-F5344CB8AC3E}">
-        <p14:creationId xmlns:p14="http://schemas.microsoft.com/office/powerpoint/2010/main" val="1024086991"/>
-      </p:ext>
-    </p:extLst>
-  </p:cSld>
-  <p:clrMapOvr>
-    <a:masterClrMapping/>
-  </p:clrMapOvr>
-</p:notes>
-</file>
-
 <file path=ppt/notesSlides/notesSlide18.xml><?xml version="1.0" encoding="utf-8"?>
 <p:notes xmlns:a="http://schemas.openxmlformats.org/drawingml/2006/main" xmlns:r="http://schemas.openxmlformats.org/officeDocument/2006/relationships" xmlns:p="http://schemas.openxmlformats.org/presentationml/2006/main">
   <p:cSld>
@@ -1162,7 +1164,7 @@
           <a:p>
             <a:fld id="{F7021451-1387-4CA6-816F-3879F97B5CBC}" type="slidenum">
               <a:rPr lang="en-US"/>
-              <a:t>25</a:t>
+              <a:t>23</a:t>
             </a:fld>
             <a:endParaRPr lang="en-US"/>
           </a:p>
@@ -1246,7 +1248,7 @@
           <a:p>
             <a:fld id="{F7021451-1387-4CA6-816F-3879F97B5CBC}" type="slidenum">
               <a:rPr lang="en-US"/>
-              <a:t>26</a:t>
+              <a:t>25</a:t>
             </a:fld>
             <a:endParaRPr lang="en-US"/>
           </a:p>
@@ -1414,7 +1416,7 @@
           <a:p>
             <a:fld id="{F7021451-1387-4CA6-816F-3879F97B5CBC}" type="slidenum">
               <a:rPr lang="en-US"/>
-              <a:t>27</a:t>
+              <a:t>26</a:t>
             </a:fld>
             <a:endParaRPr lang="en-US"/>
           </a:p>
@@ -1498,7 +1500,7 @@
           <a:p>
             <a:fld id="{F7021451-1387-4CA6-816F-3879F97B5CBC}" type="slidenum">
               <a:rPr lang="en-US"/>
-              <a:t>28</a:t>
+              <a:t>27</a:t>
             </a:fld>
             <a:endParaRPr lang="en-US"/>
           </a:p>
@@ -1582,7 +1584,7 @@
           <a:p>
             <a:fld id="{F7021451-1387-4CA6-816F-3879F97B5CBC}" type="slidenum">
               <a:rPr lang="en-US"/>
-              <a:t>29</a:t>
+              <a:t>28</a:t>
             </a:fld>
             <a:endParaRPr lang="en-US"/>
           </a:p>
@@ -1666,7 +1668,7 @@
           <a:p>
             <a:fld id="{F7021451-1387-4CA6-816F-3879F97B5CBC}" type="slidenum">
               <a:rPr lang="en-US"/>
-              <a:t>30</a:t>
+              <a:t>29</a:t>
             </a:fld>
             <a:endParaRPr lang="en-US"/>
           </a:p>
@@ -1750,7 +1752,7 @@
           <a:p>
             <a:fld id="{F7021451-1387-4CA6-816F-3879F97B5CBC}" type="slidenum">
               <a:rPr lang="en-US"/>
-              <a:t>31</a:t>
+              <a:t>30</a:t>
             </a:fld>
             <a:endParaRPr lang="en-US"/>
           </a:p>
@@ -1834,7 +1836,7 @@
           <a:p>
             <a:fld id="{F7021451-1387-4CA6-816F-3879F97B5CBC}" type="slidenum">
               <a:rPr lang="en-US"/>
-              <a:t>32</a:t>
+              <a:t>31</a:t>
             </a:fld>
             <a:endParaRPr lang="en-US"/>
           </a:p>
@@ -1918,7 +1920,7 @@
           <a:p>
             <a:fld id="{F7021451-1387-4CA6-816F-3879F97B5CBC}" type="slidenum">
               <a:rPr lang="en-US"/>
-              <a:t>33</a:t>
+              <a:t>32</a:t>
             </a:fld>
             <a:endParaRPr lang="en-US"/>
           </a:p>
@@ -2002,7 +2004,7 @@
           <a:p>
             <a:fld id="{F7021451-1387-4CA6-816F-3879F97B5CBC}" type="slidenum">
               <a:rPr lang="en-US"/>
-              <a:t>34</a:t>
+              <a:t>33</a:t>
             </a:fld>
             <a:endParaRPr lang="en-US"/>
           </a:p>
@@ -2086,7 +2088,7 @@
           <a:p>
             <a:fld id="{F7021451-1387-4CA6-816F-3879F97B5CBC}" type="slidenum">
               <a:rPr lang="en-US"/>
-              <a:t>35</a:t>
+              <a:t>34</a:t>
             </a:fld>
             <a:endParaRPr lang="en-US"/>
           </a:p>
@@ -2106,6 +2108,174 @@
 </file>
 
 <file path=ppt/notesSlides/notesSlide29.xml><?xml version="1.0" encoding="utf-8"?>
+<p:notes xmlns:a="http://schemas.openxmlformats.org/drawingml/2006/main" xmlns:r="http://schemas.openxmlformats.org/officeDocument/2006/relationships" xmlns:p="http://schemas.openxmlformats.org/presentationml/2006/main">
+  <p:cSld>
+    <p:spTree>
+      <p:nvGrpSpPr>
+        <p:cNvPr id="1" name=""/>
+        <p:cNvGrpSpPr/>
+        <p:nvPr/>
+      </p:nvGrpSpPr>
+      <p:grpSpPr>
+        <a:xfrm>
+          <a:off x="0" y="0"/>
+          <a:ext cx="0" cy="0"/>
+          <a:chOff x="0" y="0"/>
+          <a:chExt cx="0" cy="0"/>
+        </a:xfrm>
+      </p:grpSpPr>
+      <p:sp>
+        <p:nvSpPr>
+          <p:cNvPr id="2" name="Slide Image Placeholder 1"/>
+          <p:cNvSpPr>
+            <a:spLocks noGrp="1" noRot="1" noChangeAspect="1"/>
+          </p:cNvSpPr>
+          <p:nvPr>
+            <p:ph type="sldImg"/>
+          </p:nvPr>
+        </p:nvSpPr>
+        <p:spPr/>
+      </p:sp>
+      <p:sp>
+        <p:nvSpPr>
+          <p:cNvPr id="3" name="Notes Placeholder 2"/>
+          <p:cNvSpPr>
+            <a:spLocks noGrp="1"/>
+          </p:cNvSpPr>
+          <p:nvPr>
+            <p:ph type="body" idx="1"/>
+          </p:nvPr>
+        </p:nvSpPr>
+        <p:spPr/>
+        <p:txBody>
+          <a:bodyPr/>
+          <a:lstStyle/>
+          <a:p>
+            <a:endParaRPr lang="en-US" dirty="0"/>
+          </a:p>
+        </p:txBody>
+      </p:sp>
+      <p:sp>
+        <p:nvSpPr>
+          <p:cNvPr id="4" name="Slide Number Placeholder 3"/>
+          <p:cNvSpPr>
+            <a:spLocks noGrp="1"/>
+          </p:cNvSpPr>
+          <p:nvPr>
+            <p:ph type="sldNum" sz="quarter" idx="10"/>
+          </p:nvPr>
+        </p:nvSpPr>
+        <p:spPr/>
+        <p:txBody>
+          <a:bodyPr/>
+          <a:lstStyle/>
+          <a:p>
+            <a:fld id="{F7021451-1387-4CA6-816F-3879F97B5CBC}" type="slidenum">
+              <a:rPr lang="en-US"/>
+              <a:t>35</a:t>
+            </a:fld>
+            <a:endParaRPr lang="en-US"/>
+          </a:p>
+        </p:txBody>
+      </p:sp>
+    </p:spTree>
+    <p:extLst>
+      <p:ext uri="{BB962C8B-B14F-4D97-AF65-F5344CB8AC3E}">
+        <p14:creationId xmlns:p14="http://schemas.microsoft.com/office/powerpoint/2010/main" val="1024086991"/>
+      </p:ext>
+    </p:extLst>
+  </p:cSld>
+  <p:clrMapOvr>
+    <a:masterClrMapping/>
+  </p:clrMapOvr>
+</p:notes>
+</file>
+
+<file path=ppt/notesSlides/notesSlide3.xml><?xml version="1.0" encoding="utf-8"?>
+<p:notes xmlns:a="http://schemas.openxmlformats.org/drawingml/2006/main" xmlns:r="http://schemas.openxmlformats.org/officeDocument/2006/relationships" xmlns:p="http://schemas.openxmlformats.org/presentationml/2006/main">
+  <p:cSld>
+    <p:spTree>
+      <p:nvGrpSpPr>
+        <p:cNvPr id="1" name=""/>
+        <p:cNvGrpSpPr/>
+        <p:nvPr/>
+      </p:nvGrpSpPr>
+      <p:grpSpPr>
+        <a:xfrm>
+          <a:off x="0" y="0"/>
+          <a:ext cx="0" cy="0"/>
+          <a:chOff x="0" y="0"/>
+          <a:chExt cx="0" cy="0"/>
+        </a:xfrm>
+      </p:grpSpPr>
+      <p:sp>
+        <p:nvSpPr>
+          <p:cNvPr id="2" name="Slide Image Placeholder 1"/>
+          <p:cNvSpPr>
+            <a:spLocks noGrp="1" noRot="1" noChangeAspect="1"/>
+          </p:cNvSpPr>
+          <p:nvPr>
+            <p:ph type="sldImg"/>
+          </p:nvPr>
+        </p:nvSpPr>
+        <p:spPr/>
+      </p:sp>
+      <p:sp>
+        <p:nvSpPr>
+          <p:cNvPr id="3" name="Notes Placeholder 2"/>
+          <p:cNvSpPr>
+            <a:spLocks noGrp="1"/>
+          </p:cNvSpPr>
+          <p:nvPr>
+            <p:ph type="body" idx="1"/>
+          </p:nvPr>
+        </p:nvSpPr>
+        <p:spPr/>
+        <p:txBody>
+          <a:bodyPr/>
+          <a:lstStyle/>
+          <a:p>
+            <a:endParaRPr lang="en-US" dirty="0"/>
+          </a:p>
+        </p:txBody>
+      </p:sp>
+      <p:sp>
+        <p:nvSpPr>
+          <p:cNvPr id="4" name="Slide Number Placeholder 3"/>
+          <p:cNvSpPr>
+            <a:spLocks noGrp="1"/>
+          </p:cNvSpPr>
+          <p:nvPr>
+            <p:ph type="sldNum" sz="quarter" idx="10"/>
+          </p:nvPr>
+        </p:nvSpPr>
+        <p:spPr/>
+        <p:txBody>
+          <a:bodyPr/>
+          <a:lstStyle/>
+          <a:p>
+            <a:fld id="{F7021451-1387-4CA6-816F-3879F97B5CBC}" type="slidenum">
+              <a:rPr lang="en-US"/>
+              <a:t>3</a:t>
+            </a:fld>
+            <a:endParaRPr lang="en-US"/>
+          </a:p>
+        </p:txBody>
+      </p:sp>
+    </p:spTree>
+    <p:extLst>
+      <p:ext uri="{BB962C8B-B14F-4D97-AF65-F5344CB8AC3E}">
+        <p14:creationId xmlns:p14="http://schemas.microsoft.com/office/powerpoint/2010/main" val="1024086991"/>
+      </p:ext>
+    </p:extLst>
+  </p:cSld>
+  <p:clrMapOvr>
+    <a:masterClrMapping/>
+  </p:clrMapOvr>
+</p:notes>
+</file>
+
+<file path=ppt/notesSlides/notesSlide30.xml><?xml version="1.0" encoding="utf-8"?>
 <p:notes xmlns:a="http://schemas.openxmlformats.org/drawingml/2006/main" xmlns:r="http://schemas.openxmlformats.org/officeDocument/2006/relationships" xmlns:p="http://schemas.openxmlformats.org/presentationml/2006/main">
   <p:cSld>
     <p:spTree>
@@ -2249,174 +2419,6 @@
 </p:notes>
 </file>
 
-<file path=ppt/notesSlides/notesSlide3.xml><?xml version="1.0" encoding="utf-8"?>
-<p:notes xmlns:a="http://schemas.openxmlformats.org/drawingml/2006/main" xmlns:r="http://schemas.openxmlformats.org/officeDocument/2006/relationships" xmlns:p="http://schemas.openxmlformats.org/presentationml/2006/main">
-  <p:cSld>
-    <p:spTree>
-      <p:nvGrpSpPr>
-        <p:cNvPr id="1" name=""/>
-        <p:cNvGrpSpPr/>
-        <p:nvPr/>
-      </p:nvGrpSpPr>
-      <p:grpSpPr>
-        <a:xfrm>
-          <a:off x="0" y="0"/>
-          <a:ext cx="0" cy="0"/>
-          <a:chOff x="0" y="0"/>
-          <a:chExt cx="0" cy="0"/>
-        </a:xfrm>
-      </p:grpSpPr>
-      <p:sp>
-        <p:nvSpPr>
-          <p:cNvPr id="2" name="Slide Image Placeholder 1"/>
-          <p:cNvSpPr>
-            <a:spLocks noGrp="1" noRot="1" noChangeAspect="1"/>
-          </p:cNvSpPr>
-          <p:nvPr>
-            <p:ph type="sldImg"/>
-          </p:nvPr>
-        </p:nvSpPr>
-        <p:spPr/>
-      </p:sp>
-      <p:sp>
-        <p:nvSpPr>
-          <p:cNvPr id="3" name="Notes Placeholder 2"/>
-          <p:cNvSpPr>
-            <a:spLocks noGrp="1"/>
-          </p:cNvSpPr>
-          <p:nvPr>
-            <p:ph type="body" idx="1"/>
-          </p:nvPr>
-        </p:nvSpPr>
-        <p:spPr/>
-        <p:txBody>
-          <a:bodyPr/>
-          <a:lstStyle/>
-          <a:p>
-            <a:endParaRPr lang="en-US" dirty="0"/>
-          </a:p>
-        </p:txBody>
-      </p:sp>
-      <p:sp>
-        <p:nvSpPr>
-          <p:cNvPr id="4" name="Slide Number Placeholder 3"/>
-          <p:cNvSpPr>
-            <a:spLocks noGrp="1"/>
-          </p:cNvSpPr>
-          <p:nvPr>
-            <p:ph type="sldNum" sz="quarter" idx="10"/>
-          </p:nvPr>
-        </p:nvSpPr>
-        <p:spPr/>
-        <p:txBody>
-          <a:bodyPr/>
-          <a:lstStyle/>
-          <a:p>
-            <a:fld id="{F7021451-1387-4CA6-816F-3879F97B5CBC}" type="slidenum">
-              <a:rPr lang="en-US"/>
-              <a:t>3</a:t>
-            </a:fld>
-            <a:endParaRPr lang="en-US"/>
-          </a:p>
-        </p:txBody>
-      </p:sp>
-    </p:spTree>
-    <p:extLst>
-      <p:ext uri="{BB962C8B-B14F-4D97-AF65-F5344CB8AC3E}">
-        <p14:creationId xmlns:p14="http://schemas.microsoft.com/office/powerpoint/2010/main" val="1024086991"/>
-      </p:ext>
-    </p:extLst>
-  </p:cSld>
-  <p:clrMapOvr>
-    <a:masterClrMapping/>
-  </p:clrMapOvr>
-</p:notes>
-</file>
-
-<file path=ppt/notesSlides/notesSlide30.xml><?xml version="1.0" encoding="utf-8"?>
-<p:notes xmlns:a="http://schemas.openxmlformats.org/drawingml/2006/main" xmlns:r="http://schemas.openxmlformats.org/officeDocument/2006/relationships" xmlns:p="http://schemas.openxmlformats.org/presentationml/2006/main">
-  <p:cSld>
-    <p:spTree>
-      <p:nvGrpSpPr>
-        <p:cNvPr id="1" name=""/>
-        <p:cNvGrpSpPr/>
-        <p:nvPr/>
-      </p:nvGrpSpPr>
-      <p:grpSpPr>
-        <a:xfrm>
-          <a:off x="0" y="0"/>
-          <a:ext cx="0" cy="0"/>
-          <a:chOff x="0" y="0"/>
-          <a:chExt cx="0" cy="0"/>
-        </a:xfrm>
-      </p:grpSpPr>
-      <p:sp>
-        <p:nvSpPr>
-          <p:cNvPr id="2" name="Slide Image Placeholder 1"/>
-          <p:cNvSpPr>
-            <a:spLocks noGrp="1" noRot="1" noChangeAspect="1"/>
-          </p:cNvSpPr>
-          <p:nvPr>
-            <p:ph type="sldImg"/>
-          </p:nvPr>
-        </p:nvSpPr>
-        <p:spPr/>
-      </p:sp>
-      <p:sp>
-        <p:nvSpPr>
-          <p:cNvPr id="3" name="Notes Placeholder 2"/>
-          <p:cNvSpPr>
-            <a:spLocks noGrp="1"/>
-          </p:cNvSpPr>
-          <p:nvPr>
-            <p:ph type="body" idx="1"/>
-          </p:nvPr>
-        </p:nvSpPr>
-        <p:spPr/>
-        <p:txBody>
-          <a:bodyPr/>
-          <a:lstStyle/>
-          <a:p>
-            <a:endParaRPr lang="en-US" dirty="0"/>
-          </a:p>
-        </p:txBody>
-      </p:sp>
-      <p:sp>
-        <p:nvSpPr>
-          <p:cNvPr id="4" name="Slide Number Placeholder 3"/>
-          <p:cNvSpPr>
-            <a:spLocks noGrp="1"/>
-          </p:cNvSpPr>
-          <p:nvPr>
-            <p:ph type="sldNum" sz="quarter" idx="10"/>
-          </p:nvPr>
-        </p:nvSpPr>
-        <p:spPr/>
-        <p:txBody>
-          <a:bodyPr/>
-          <a:lstStyle/>
-          <a:p>
-            <a:fld id="{F7021451-1387-4CA6-816F-3879F97B5CBC}" type="slidenum">
-              <a:rPr lang="en-US"/>
-              <a:t>37</a:t>
-            </a:fld>
-            <a:endParaRPr lang="en-US"/>
-          </a:p>
-        </p:txBody>
-      </p:sp>
-    </p:spTree>
-    <p:extLst>
-      <p:ext uri="{BB962C8B-B14F-4D97-AF65-F5344CB8AC3E}">
-        <p14:creationId xmlns:p14="http://schemas.microsoft.com/office/powerpoint/2010/main" val="1024086991"/>
-      </p:ext>
-    </p:extLst>
-  </p:cSld>
-  <p:clrMapOvr>
-    <a:masterClrMapping/>
-  </p:clrMapOvr>
-</p:notes>
-</file>
-
 <file path=ppt/notesSlides/notesSlide31.xml><?xml version="1.0" encoding="utf-8"?>
 <p:notes xmlns:a="http://schemas.openxmlformats.org/drawingml/2006/main" xmlns:r="http://schemas.openxmlformats.org/officeDocument/2006/relationships" xmlns:p="http://schemas.openxmlformats.org/presentationml/2006/main">
   <p:cSld>
@@ -2482,7 +2484,7 @@
           <a:p>
             <a:fld id="{F7021451-1387-4CA6-816F-3879F97B5CBC}" type="slidenum">
               <a:rPr lang="en-US"/>
-              <a:t>38</a:t>
+              <a:t>37</a:t>
             </a:fld>
             <a:endParaRPr lang="en-US"/>
           </a:p>
@@ -2566,7 +2568,7 @@
           <a:p>
             <a:fld id="{F7021451-1387-4CA6-816F-3879F97B5CBC}" type="slidenum">
               <a:rPr lang="en-US"/>
-              <a:t>39</a:t>
+              <a:t>38</a:t>
             </a:fld>
             <a:endParaRPr lang="en-US"/>
           </a:p>
@@ -2650,7 +2652,7 @@
           <a:p>
             <a:fld id="{F7021451-1387-4CA6-816F-3879F97B5CBC}" type="slidenum">
               <a:rPr lang="en-US"/>
-              <a:t>40</a:t>
+              <a:t>39</a:t>
             </a:fld>
             <a:endParaRPr lang="en-US"/>
           </a:p>
@@ -2734,7 +2736,7 @@
           <a:p>
             <a:fld id="{F7021451-1387-4CA6-816F-3879F97B5CBC}" type="slidenum">
               <a:rPr lang="en-US"/>
-              <a:t>41</a:t>
+              <a:t>40</a:t>
             </a:fld>
             <a:endParaRPr lang="en-US"/>
           </a:p>
@@ -2818,7 +2820,7 @@
           <a:p>
             <a:fld id="{F7021451-1387-4CA6-816F-3879F97B5CBC}" type="slidenum">
               <a:rPr lang="en-US"/>
-              <a:t>42</a:t>
+              <a:t>41</a:t>
             </a:fld>
             <a:endParaRPr lang="en-US"/>
           </a:p>
@@ -2902,7 +2904,7 @@
           <a:p>
             <a:fld id="{F7021451-1387-4CA6-816F-3879F97B5CBC}" type="slidenum">
               <a:rPr lang="en-US"/>
-              <a:t>43</a:t>
+              <a:t>42</a:t>
             </a:fld>
             <a:endParaRPr lang="en-US"/>
           </a:p>
@@ -2922,6 +2924,90 @@
 </file>
 
 <file path=ppt/notesSlides/notesSlide37.xml><?xml version="1.0" encoding="utf-8"?>
+<p:notes xmlns:a="http://schemas.openxmlformats.org/drawingml/2006/main" xmlns:r="http://schemas.openxmlformats.org/officeDocument/2006/relationships" xmlns:p="http://schemas.openxmlformats.org/presentationml/2006/main">
+  <p:cSld>
+    <p:spTree>
+      <p:nvGrpSpPr>
+        <p:cNvPr id="1" name=""/>
+        <p:cNvGrpSpPr/>
+        <p:nvPr/>
+      </p:nvGrpSpPr>
+      <p:grpSpPr>
+        <a:xfrm>
+          <a:off x="0" y="0"/>
+          <a:ext cx="0" cy="0"/>
+          <a:chOff x="0" y="0"/>
+          <a:chExt cx="0" cy="0"/>
+        </a:xfrm>
+      </p:grpSpPr>
+      <p:sp>
+        <p:nvSpPr>
+          <p:cNvPr id="2" name="Slide Image Placeholder 1"/>
+          <p:cNvSpPr>
+            <a:spLocks noGrp="1" noRot="1" noChangeAspect="1"/>
+          </p:cNvSpPr>
+          <p:nvPr>
+            <p:ph type="sldImg"/>
+          </p:nvPr>
+        </p:nvSpPr>
+        <p:spPr/>
+      </p:sp>
+      <p:sp>
+        <p:nvSpPr>
+          <p:cNvPr id="3" name="Notes Placeholder 2"/>
+          <p:cNvSpPr>
+            <a:spLocks noGrp="1"/>
+          </p:cNvSpPr>
+          <p:nvPr>
+            <p:ph type="body" idx="1"/>
+          </p:nvPr>
+        </p:nvSpPr>
+        <p:spPr/>
+        <p:txBody>
+          <a:bodyPr/>
+          <a:lstStyle/>
+          <a:p>
+            <a:endParaRPr lang="en-US" dirty="0"/>
+          </a:p>
+        </p:txBody>
+      </p:sp>
+      <p:sp>
+        <p:nvSpPr>
+          <p:cNvPr id="4" name="Slide Number Placeholder 3"/>
+          <p:cNvSpPr>
+            <a:spLocks noGrp="1"/>
+          </p:cNvSpPr>
+          <p:nvPr>
+            <p:ph type="sldNum" sz="quarter" idx="10"/>
+          </p:nvPr>
+        </p:nvSpPr>
+        <p:spPr/>
+        <p:txBody>
+          <a:bodyPr/>
+          <a:lstStyle/>
+          <a:p>
+            <a:fld id="{F7021451-1387-4CA6-816F-3879F97B5CBC}" type="slidenum">
+              <a:rPr lang="en-US"/>
+              <a:t>43</a:t>
+            </a:fld>
+            <a:endParaRPr lang="en-US"/>
+          </a:p>
+        </p:txBody>
+      </p:sp>
+    </p:spTree>
+    <p:extLst>
+      <p:ext uri="{BB962C8B-B14F-4D97-AF65-F5344CB8AC3E}">
+        <p14:creationId xmlns:p14="http://schemas.microsoft.com/office/powerpoint/2010/main" val="1024086991"/>
+      </p:ext>
+    </p:extLst>
+  </p:cSld>
+  <p:clrMapOvr>
+    <a:masterClrMapping/>
+  </p:clrMapOvr>
+</p:notes>
+</file>
+
+<file path=ppt/notesSlides/notesSlide38.xml><?xml version="1.0" encoding="utf-8"?>
 <p:notes xmlns:a="http://schemas.openxmlformats.org/drawingml/2006/main" xmlns:r="http://schemas.openxmlformats.org/officeDocument/2006/relationships" xmlns:p="http://schemas.openxmlformats.org/presentationml/2006/main">
   <p:cSld>
     <p:spTree>
@@ -11767,7 +11853,7 @@
 </file>
 
 <file path=ppt/slides/slide17.xml><?xml version="1.0" encoding="utf-8"?>
-<p:sld xmlns:a="http://schemas.openxmlformats.org/drawingml/2006/main" xmlns:r="http://schemas.openxmlformats.org/officeDocument/2006/relationships" xmlns:p="http://schemas.openxmlformats.org/presentationml/2006/main">
+<p:sld xmlns:a="http://schemas.openxmlformats.org/drawingml/2006/main" xmlns:r="http://schemas.openxmlformats.org/officeDocument/2006/relationships" xmlns:p="http://schemas.openxmlformats.org/presentationml/2006/main" show="0">
   <p:cSld>
     <p:spTree>
       <p:nvGrpSpPr>
@@ -15698,7 +15784,7 @@
         <p:spPr>
           <a:xfrm>
             <a:off x="5943600" y="2011680"/>
-            <a:ext cx="5760720" cy="3657600"/>
+            <a:ext cx="5760720" cy="2752035"/>
           </a:xfrm>
           <a:prstGeom prst="rect">
             <a:avLst/>
@@ -15729,7 +15815,7 @@
               <a:defRPr/>
             </a:pPr>
             <a:r>
-              <a:rPr kumimoji="0" sz="1400" b="1" i="0" u="none" strike="noStrike" kern="1200" cap="none" spc="0" normalizeH="0" baseline="0" noProof="0">
+              <a:rPr kumimoji="0" sz="1400" b="1" i="0" u="none" strike="noStrike" kern="1200" cap="none" spc="0" normalizeH="0" baseline="0" noProof="0" dirty="0">
                 <a:ln>
                   <a:noFill/>
                 </a:ln>
@@ -15746,7 +15832,7 @@
               <a:t>•  </a:t>
             </a:r>
             <a:r>
-              <a:rPr kumimoji="0" sz="1400" b="1" i="0" u="none" strike="noStrike" kern="1200" cap="none" spc="0" normalizeH="0" baseline="0" noProof="0">
+              <a:rPr kumimoji="0" sz="1400" b="1" i="0" u="none" strike="noStrike" kern="1200" cap="none" spc="0" normalizeH="0" baseline="0" noProof="0" dirty="0">
                 <a:ln>
                   <a:noFill/>
                 </a:ln>
@@ -15763,7 +15849,7 @@
               <a:t>Two lines, two speeds. </a:t>
             </a:r>
             <a:r>
-              <a:rPr kumimoji="0" sz="1350" b="0" i="0" u="none" strike="noStrike" kern="1200" cap="none" spc="0" normalizeH="0" baseline="0" noProof="0">
+              <a:rPr kumimoji="0" sz="1350" b="0" i="0" u="none" strike="noStrike" kern="1200" cap="none" spc="0" normalizeH="0" baseline="0" noProof="0" dirty="0">
                 <a:ln>
                   <a:noFill/>
                 </a:ln>
@@ -15799,7 +15885,7 @@
               <a:defRPr/>
             </a:pPr>
             <a:r>
-              <a:rPr kumimoji="0" sz="1400" b="1" i="0" u="none" strike="noStrike" kern="1200" cap="none" spc="0" normalizeH="0" baseline="0" noProof="0">
+              <a:rPr kumimoji="0" sz="1400" b="1" i="0" u="none" strike="noStrike" kern="1200" cap="none" spc="0" normalizeH="0" baseline="0" noProof="0" dirty="0">
                 <a:ln>
                   <a:noFill/>
                 </a:ln>
@@ -15816,7 +15902,7 @@
               <a:t>•  </a:t>
             </a:r>
             <a:r>
-              <a:rPr kumimoji="0" sz="1400" b="1" i="0" u="none" strike="noStrike" kern="1200" cap="none" spc="0" normalizeH="0" baseline="0" noProof="0">
+              <a:rPr kumimoji="0" sz="1400" b="1" i="0" u="none" strike="noStrike" kern="1200" cap="none" spc="0" normalizeH="0" baseline="0" noProof="0" dirty="0">
                 <a:ln>
                   <a:noFill/>
                 </a:ln>
@@ -15833,7 +15919,7 @@
               <a:t>It is never one number. </a:t>
             </a:r>
             <a:r>
-              <a:rPr kumimoji="0" sz="1350" b="0" i="0" u="none" strike="noStrike" kern="1200" cap="none" spc="0" normalizeH="0" baseline="0" noProof="0">
+              <a:rPr kumimoji="0" sz="1350" b="0" i="0" u="none" strike="noStrike" kern="1200" cap="none" spc="0" normalizeH="0" baseline="0" noProof="0" dirty="0">
                 <a:ln>
                   <a:noFill/>
                 </a:ln>
@@ -15847,8 +15933,22 @@
                 <a:ea typeface="+mn-ea"/>
                 <a:cs typeface="+mn-cs"/>
               </a:rPr>
-              <a:t>Over two years the pair swings from about -0.2 to +0.85. A single average correlation would hide all of this.</a:t>
-            </a:r>
+              <a:t>Over two years the pair swings from about </a:t>
+            </a:r>
+            <a:endParaRPr kumimoji="0" lang="en-US" sz="1350" b="0" i="0" u="none" strike="noStrike" kern="1200" cap="none" spc="0" normalizeH="0" baseline="0" noProof="0" dirty="0">
+              <a:ln>
+                <a:noFill/>
+              </a:ln>
+              <a:solidFill>
+                <a:srgbClr val="59636B"/>
+              </a:solidFill>
+              <a:effectLst/>
+              <a:uLnTx/>
+              <a:uFillTx/>
+              <a:latin typeface="Arial"/>
+              <a:ea typeface="+mn-ea"/>
+              <a:cs typeface="+mn-cs"/>
+            </a:endParaRPr>
           </a:p>
           <a:p>
             <a:pPr marL="0" marR="0" lvl="0" indent="0" algn="l" defTabSz="457200" rtl="0" eaLnBrk="1" fontAlgn="auto" latinLnBrk="0" hangingPunct="1">
@@ -15869,12 +15969,12 @@
               <a:defRPr/>
             </a:pPr>
             <a:r>
-              <a:rPr kumimoji="0" sz="1400" b="1" i="0" u="none" strike="noStrike" kern="1200" cap="none" spc="0" normalizeH="0" baseline="0" noProof="0">
+              <a:rPr kumimoji="0" sz="1350" b="0" i="0" u="none" strike="noStrike" kern="1200" cap="none" spc="0" normalizeH="0" baseline="0" noProof="0" dirty="0">
                 <a:ln>
                   <a:noFill/>
                 </a:ln>
                 <a:solidFill>
-                  <a:srgbClr val="A51C30"/>
+                  <a:srgbClr val="59636B"/>
                 </a:solidFill>
                 <a:effectLst/>
                 <a:uLnTx/>
@@ -15883,41 +15983,7 @@
                 <a:ea typeface="+mn-ea"/>
                 <a:cs typeface="+mn-cs"/>
               </a:rPr>
-              <a:t>•  </a:t>
-            </a:r>
-            <a:r>
-              <a:rPr kumimoji="0" sz="1400" b="1" i="0" u="none" strike="noStrike" kern="1200" cap="none" spc="0" normalizeH="0" baseline="0" noProof="0">
-                <a:ln>
-                  <a:noFill/>
-                </a:ln>
-                <a:solidFill>
-                  <a:srgbClr val="1E1E1E"/>
-                </a:solidFill>
-                <a:effectLst/>
-                <a:uLnTx/>
-                <a:uFillTx/>
-                <a:latin typeface="Arial"/>
-                <a:ea typeface="+mn-ea"/>
-                <a:cs typeface="+mn-cs"/>
-              </a:rPr>
-              <a:t>Watch the peaks. </a:t>
-            </a:r>
-            <a:r>
-              <a:rPr kumimoji="0" sz="1350" b="0" i="0" u="none" strike="noStrike" kern="1200" cap="none" spc="0" normalizeH="0" baseline="0" noProof="0">
-                <a:ln>
-                  <a:noFill/>
-                </a:ln>
-                <a:solidFill>
-                  <a:srgbClr val="59636B"/>
-                </a:solidFill>
-                <a:effectLst/>
-                <a:uLnTx/>
-                <a:uFillTx/>
-                <a:latin typeface="Arial"/>
-                <a:ea typeface="+mn-ea"/>
-                <a:cs typeface="+mn-cs"/>
-              </a:rPr>
-              <a:t>Around mid-2025 both lines climb together toward 0.8: AAPL and JPM move almost as one, so holding both adds little diversification just then.</a:t>
+              <a:t>-0.2 to +0.85. A single average correlation would hide all of this.</a:t>
             </a:r>
           </a:p>
           <a:p>
@@ -15939,7 +16005,7 @@
               <a:defRPr/>
             </a:pPr>
             <a:r>
-              <a:rPr kumimoji="0" sz="1400" b="1" i="0" u="none" strike="noStrike" kern="1200" cap="none" spc="0" normalizeH="0" baseline="0" noProof="0">
+              <a:rPr kumimoji="0" sz="1400" b="1" i="0" u="none" strike="noStrike" kern="1200" cap="none" spc="0" normalizeH="0" baseline="0" noProof="0" dirty="0">
                 <a:ln>
                   <a:noFill/>
                 </a:ln>
@@ -15956,7 +16022,7 @@
               <a:t>•  </a:t>
             </a:r>
             <a:r>
-              <a:rPr kumimoji="0" sz="1400" b="1" i="0" u="none" strike="noStrike" kern="1200" cap="none" spc="0" normalizeH="0" baseline="0" noProof="0">
+              <a:rPr kumimoji="0" sz="1400" b="1" i="0" u="none" strike="noStrike" kern="1200" cap="none" spc="0" normalizeH="0" baseline="0" noProof="0" dirty="0">
                 <a:ln>
                   <a:noFill/>
                 </a:ln>
@@ -15970,10 +16036,10 @@
                 <a:ea typeface="+mn-ea"/>
                 <a:cs typeface="+mn-cs"/>
               </a:rPr>
-              <a:t>Blue warns, orange confirms. </a:t>
-            </a:r>
-            <a:r>
-              <a:rPr kumimoji="0" sz="1350" b="0" i="0" u="none" strike="noStrike" kern="1200" cap="none" spc="0" normalizeH="0" baseline="0" noProof="0">
+              <a:t>Watch the peaks. </a:t>
+            </a:r>
+            <a:r>
+              <a:rPr kumimoji="0" sz="1350" b="0" i="0" u="none" strike="noStrike" kern="1200" cap="none" spc="0" normalizeH="0" baseline="0" noProof="0" dirty="0">
                 <a:ln>
                   <a:noFill/>
                 </a:ln>
@@ -15987,7 +16053,7 @@
                 <a:ea typeface="+mn-ea"/>
                 <a:cs typeface="+mn-cs"/>
               </a:rPr>
-              <a:t>The blue line spikes early; the orange only shifts once a move persists, so it carries the calmer underlying story.</a:t>
+              <a:t>Around mid-2025 both lines climb together toward 0.8: AAPL and JPM move almost as one, so holding both adds little diversification just then.</a:t>
             </a:r>
           </a:p>
           <a:p>
@@ -16009,7 +16075,7 @@
               <a:defRPr/>
             </a:pPr>
             <a:r>
-              <a:rPr kumimoji="0" sz="1400" b="1" i="0" u="none" strike="noStrike" kern="1200" cap="none" spc="0" normalizeH="0" baseline="0" noProof="0">
+              <a:rPr kumimoji="0" sz="1400" b="1" i="0" u="none" strike="noStrike" kern="1200" cap="none" spc="0" normalizeH="0" baseline="0" noProof="0" dirty="0">
                 <a:ln>
                   <a:noFill/>
                 </a:ln>
@@ -16026,7 +16092,7 @@
               <a:t>•  </a:t>
             </a:r>
             <a:r>
-              <a:rPr kumimoji="0" sz="1400" b="1" i="0" u="none" strike="noStrike" kern="1200" cap="none" spc="0" normalizeH="0" baseline="0" noProof="0">
+              <a:rPr kumimoji="0" sz="1400" b="1" i="0" u="none" strike="noStrike" kern="1200" cap="none" spc="0" normalizeH="0" baseline="0" noProof="0" dirty="0">
                 <a:ln>
                   <a:noFill/>
                 </a:ln>
@@ -16040,10 +16106,80 @@
                 <a:ea typeface="+mn-ea"/>
                 <a:cs typeface="+mn-cs"/>
               </a:rPr>
+              <a:t>Blue warns, orange confirms. </a:t>
+            </a:r>
+            <a:r>
+              <a:rPr kumimoji="0" sz="1350" b="0" i="0" u="none" strike="noStrike" kern="1200" cap="none" spc="0" normalizeH="0" baseline="0" noProof="0" dirty="0">
+                <a:ln>
+                  <a:noFill/>
+                </a:ln>
+                <a:solidFill>
+                  <a:srgbClr val="59636B"/>
+                </a:solidFill>
+                <a:effectLst/>
+                <a:uLnTx/>
+                <a:uFillTx/>
+                <a:latin typeface="Arial"/>
+                <a:ea typeface="+mn-ea"/>
+                <a:cs typeface="+mn-cs"/>
+              </a:rPr>
+              <a:t>The blue line spikes early; the orange only shifts once a move persists, so it carries the calmer underlying story.</a:t>
+            </a:r>
+          </a:p>
+          <a:p>
+            <a:pPr marL="0" marR="0" lvl="0" indent="0" algn="l" defTabSz="457200" rtl="0" eaLnBrk="1" fontAlgn="auto" latinLnBrk="0" hangingPunct="1">
+              <a:lnSpc>
+                <a:spcPct val="100000"/>
+              </a:lnSpc>
+              <a:spcBef>
+                <a:spcPts val="0"/>
+              </a:spcBef>
+              <a:spcAft>
+                <a:spcPts val="200"/>
+              </a:spcAft>
+              <a:buClrTx/>
+              <a:buSzTx/>
+              <a:buFontTx/>
+              <a:buNone/>
+              <a:tabLst/>
+              <a:defRPr/>
+            </a:pPr>
+            <a:r>
+              <a:rPr kumimoji="0" sz="1400" b="1" i="0" u="none" strike="noStrike" kern="1200" cap="none" spc="0" normalizeH="0" baseline="0" noProof="0" dirty="0">
+                <a:ln>
+                  <a:noFill/>
+                </a:ln>
+                <a:solidFill>
+                  <a:srgbClr val="A51C30"/>
+                </a:solidFill>
+                <a:effectLst/>
+                <a:uLnTx/>
+                <a:uFillTx/>
+                <a:latin typeface="Arial"/>
+                <a:ea typeface="+mn-ea"/>
+                <a:cs typeface="+mn-cs"/>
+              </a:rPr>
+              <a:t>•  </a:t>
+            </a:r>
+            <a:r>
+              <a:rPr kumimoji="0" sz="1400" b="1" i="0" u="none" strike="noStrike" kern="1200" cap="none" spc="0" normalizeH="0" baseline="0" noProof="0" dirty="0">
+                <a:ln>
+                  <a:noFill/>
+                </a:ln>
+                <a:solidFill>
+                  <a:srgbClr val="1E1E1E"/>
+                </a:solidFill>
+                <a:effectLst/>
+                <a:uLnTx/>
+                <a:uFillTx/>
+                <a:latin typeface="Arial"/>
+                <a:ea typeface="+mn-ea"/>
+                <a:cs typeface="+mn-cs"/>
+              </a:rPr>
               <a:t>Orange starts late. </a:t>
             </a:r>
             <a:r>
-              <a:rPr kumimoji="0" sz="1350" b="0" i="0" u="none" strike="noStrike" kern="1200" cap="none" spc="0" normalizeH="0" baseline="0" noProof="0">
+              <a:rPr kumimoji="0" sz="1350" b="0" i="0" u="none" strike="noStrike" kern="1200" cap="none" spc="0" normalizeH="0" baseline="0" noProof="0" dirty="0">
                 <a:ln>
                   <a:noFill/>
                 </a:ln>
